--- a/docs/AI-KOL-Progress-Report.pptx
+++ b/docs/AI-KOL-Progress-Report.pptx
@@ -3297,7 +3297,7 @@
                 </a:solidFill>
                 <a:latin typeface="Segoe UI"/>
               </a:rPr>
-              <a:t>Local-first virtual influencer pipeline  ·  RTX 5070 (12 GB)  ·  2026-07-31</a:t>
+              <a:t>Local-first virtual influencer pipeline  ·  RTX 5070 (12 GB)  ·  2026-08-03</a:t>
             </a:r>
           </a:p>
         </p:txBody>
@@ -3811,11 +3811,11 @@
                       <a:r>
                         <a:rPr sz="1100" b="0">
                           <a:solidFill>
-                            <a:srgbClr val="C62B2B"/>
-                          </a:solidFill>
-                          <a:latin typeface="Segoe UI"/>
-                        </a:rPr>
-                        <a:t>not running</a:t>
+                            <a:srgbClr val="0F8A4C"/>
+                          </a:solidFill>
+                          <a:latin typeface="Segoe UI"/>
+                        </a:rPr>
+                        <a:t>running</a:t>
                       </a:r>
                     </a:p>
                   </a:txBody>
@@ -5164,7 +5164,7 @@
                 </a:solidFill>
                 <a:latin typeface="Segoe UI"/>
               </a:rPr>
-              <a:t>GPU: NVIDIA GeForce RTX 5070 — 5,175 / 12,227 MiB used, 7,052 MiB free</a:t>
+              <a:t>GPU: NVIDIA GeForce RTX 5070 — 9,697 / 12,227 MiB used, 2,530 MiB free</a:t>
             </a:r>
           </a:p>
         </p:txBody>
